--- a/10-plantas/01-steelmaking/05-capacitacion/MS-ACE-04/MS-ACE-04_Capacitacion_AMMX.pptx
+++ b/10-plantas/01-steelmaking/05-capacitacion/MS-ACE-04/MS-ACE-04_Capacitacion_AMMX.pptx
@@ -3582,7 +3582,7 @@
                 <a:ea typeface="Century Gothic" pitchFamily="34" charset="-122"/>
                 <a:cs typeface="Century Gothic" pitchFamily="34" charset="-120"/>
               </a:rPr>
-              <a:t>Para: S-09 · S-04 · S-05 · S-03 · S-08 · S-13 · S-14 · S-15 · S-17 · S-19 · C-04 · C-05 · C-06</a:t>
+              <a:t>Para: S-09 · S-04 · S-05 · S-03 · S-08 · S-13 · S-14 · S-15 · S-17 · S-19 · S-20 · C-04 · C-05 · C-06</a:t>
             </a:r>
             <a:endParaRPr lang="en-US" sz="1100" dirty="0"/>
           </a:p>
@@ -18671,7 +18671,7 @@
                 <a:ea typeface="Calibri" pitchFamily="34" charset="-122"/>
                 <a:cs typeface="Calibri" pitchFamily="34" charset="-120"/>
               </a:rPr>
-              <a:t>Siguiente paso: OJT supervisado y evaluación práctica (TD-P07); registro en IMaS y DC-3/SIRCE. Validación: visto bueno seguridad (pendientes: técnica, laboral, diseño instruccional).</a:t>
+              <a:t>Siguiente paso: OJT supervisado y evaluación práctica (TD-P07); registro en IMaS y DC-3/SIRCE. Validación: visto bueno técnica, seguridad, laboral, diseño instruccional.</a:t>
             </a:r>
             <a:endParaRPr lang="en-US" sz="750" dirty="0"/>
           </a:p>
@@ -24315,7 +24315,7 @@
                 <a:ea typeface="Century Gothic" pitchFamily="34" charset="-122"/>
                 <a:cs typeface="Century Gothic" pitchFamily="34" charset="-120"/>
               </a:rPr>
-              <a:t>Cable: 12 alambres rotos en un paso o diámetro −5 %: retirar [Verificar ASME/OEM].</a:t>
+              <a:t>Cable de colada: 6 alambres rotos en un paso, 3 en un torón o Ø −5 %: retirar (MM-GR-01).</a:t>
             </a:r>
             <a:endParaRPr lang="en-US" sz="1100" dirty="0"/>
           </a:p>
@@ -25263,7 +25263,7 @@
                           <a:ea typeface="Century Gothic" pitchFamily="34" charset="-122"/>
                           <a:cs typeface="Century Gothic" pitchFamily="34" charset="-120"/>
                         </a:rPr>
-                        <a:t>120/40 t; 2 × 50 t + 2 × 25 t</a:t>
+                        <a:t>120/40 t · CC: 2×50, 2×45 y 1×25 t</a:t>
                       </a:r>
                       <a:endParaRPr lang="en-US" sz="1000" dirty="0">
                         <a:latin typeface="Century Gothic" charset="0"/>
@@ -25811,7 +25811,7 @@
                           <a:ea typeface="Century Gothic" pitchFamily="34" charset="-122"/>
                           <a:cs typeface="Century Gothic" pitchFamily="34" charset="-120"/>
                         </a:rPr>
-                        <a:t>Retiro: 12 alambres rotos en un paso</a:t>
+                        <a:t>Retiro: 6 rotos en un paso o 3 en torón</a:t>
                       </a:r>
                       <a:endParaRPr lang="en-US" sz="1000" dirty="0">
                         <a:latin typeface="Century Gothic" charset="0"/>
